--- a/docs/ppt/GEOG0113-010.pptx
+++ b/docs/ppt/GEOG0113-010.pptx
@@ -11493,17 +11493,29 @@
               <a:buChar char="•"/>
             </a:pPr>
             <a:r>
-              <a:rPr lang="en-US" sz="3200" dirty="0"/>
-              <a:t>https://ucl-eo-geog0133.readthedocs-hosted.com/</a:t>
-            </a:r>
-            <a:r>
-              <a:rPr lang="en-US" sz="3200" dirty="0" err="1"/>
-              <a:t>en</a:t>
-            </a:r>
-            <a:r>
-              <a:rPr lang="en-US" sz="3200" dirty="0"/>
-              <a:t>/latest/notebooks/011_Photosynthesis_Modelling_Practical.html</a:t>
-            </a:r>
+              <a:rPr lang="en-US" sz="3200">
+                <a:hlinkClick r:id="rId3"/>
+              </a:rPr>
+              <a:t>https</a:t>
+            </a:r>
+            <a:r>
+              <a:rPr lang="en-US" sz="3200" dirty="0">
+                <a:hlinkClick r:id="rId3"/>
+              </a:rPr>
+              <a:t>://github.com/UCL-EO/geog0133/blob/main/docs/notebooks_lab/011_Photosynthesis_Modelling_Practical.ipynb</a:t>
+            </a:r>
+            <a:endParaRPr lang="en-US" sz="3200" dirty="0"/>
+          </a:p>
+          <a:p>
+            <a:pPr marL="457200" lvl="0" indent="-431800">
+              <a:buClr>
+                <a:srgbClr val="000000"/>
+              </a:buClr>
+              <a:buSzPct val="166666"/>
+              <a:buFont typeface="Arial"/>
+              <a:buChar char="•"/>
+            </a:pPr>
+            <a:endParaRPr lang="en-US" sz="3200" dirty="0"/>
           </a:p>
         </p:txBody>
       </p:sp>
